--- a/docs/Spot-visao-atual-do-sistema.pptx
+++ b/docs/Spot-visao-atual-do-sistema.pptx
@@ -8594,7 +8594,7 @@
                   <a:srgbClr val="102A43"/>
                 </a:solidFill>
               </a:rPr>
-              <a:t>SQLite + Python/Pandas</a:t>
+              <a:t>PostgreSQL + Python/Pandas</a:t>
             </a:r>
             <a:endParaRPr lang="en-US" sz="1700" dirty="0"/>
           </a:p>
@@ -8632,7 +8632,7 @@
                   <a:srgbClr val="60758A"/>
                 </a:solidFill>
               </a:rPr>
-              <a:t>Persistência local e consolidação de indicadores gráficos</a:t>
+              <a:t>Persistência relacional e consolidação de indicadores gráficos</a:t>
             </a:r>
             <a:endParaRPr lang="en-US" sz="1150" dirty="0"/>
           </a:p>
@@ -10100,7 +10100,7 @@
                   <a:srgbClr val="172B3A"/>
                 </a:solidFill>
               </a:rPr>
-              <a:t>Substituir SQLite e sessão local na produção escalável</a:t>
+              <a:t>Hospedar PostgreSQL e sessão em infraestrutura de produção</a:t>
             </a:r>
             <a:endParaRPr lang="en-US" sz="1400" dirty="0"/>
           </a:p>
